--- a/examples/showcase/_out/05_space_aware.pptx
+++ b/examples/showcase/_out/05_space_aware.pptx
@@ -3175,7 +3175,7 @@
         <p:spPr>
           <a:xfrm>
             <a:off x="548640" y="1920240"/>
-            <a:ext cx="5486400" cy="2743200"/>
+            <a:ext cx="5486400" cy="1828800"/>
           </a:xfrm>
           <a:prstGeom prst="rect">
             <a:avLst/>
@@ -3198,18 +3198,17 @@
         </p:spPr>
         <p:txBody>
           <a:bodyPr wrap="square" lIns="177800" rIns="177800" tIns="177800" bIns="177800">
-            <a:spAutoFit/>
+            <a:noAutofit/>
           </a:bodyPr>
           <a:lstStyle/>
           <a:p>
-            <a:pPr>
-              <a:defRPr sz="3600" b="1">
+            <a:r>
+              <a:rPr sz="3600" b="1">
                 <a:solidFill>
                   <a:srgbClr val="0F172A"/>
                 </a:solidFill>
-              </a:defRPr>
-            </a:pPr>
-            <a:r>
+                <a:latin typeface="Inter"/>
+              </a:rPr>
               <a:t>Q4 2026 Customer Outcomes Review — flagship rollouts, expansion bookings, and headline retention metrics</a:t>
             </a:r>
           </a:p>
@@ -3223,7 +3222,7 @@
         </p:nvSpPr>
         <p:spPr>
           <a:xfrm>
-            <a:off x="548640" y="4937760"/>
+            <a:off x="548640" y="4023360"/>
             <a:ext cx="5486400" cy="365760"/>
           </a:xfrm>
           <a:prstGeom prst="rect">
@@ -3259,7 +3258,7 @@
         <p:spPr>
           <a:xfrm>
             <a:off x="6126480" y="1920240"/>
-            <a:ext cx="5486400" cy="2743200"/>
+            <a:ext cx="5486400" cy="1828800"/>
           </a:xfrm>
           <a:prstGeom prst="rect">
             <a:avLst/>
@@ -3286,20 +3285,16 @@
           </a:bodyPr>
           <a:lstStyle/>
           <a:p>
-            <a:pPr>
-              <a:defRPr>
+            <a:r>
+              <a:rPr sz="3000" b="1" i="0">
                 <a:solidFill>
                   <a:srgbClr val="0F172A"/>
                 </a:solidFill>
-              </a:defRPr>
-            </a:pPr>
-            <a:r>
-              <a:rPr sz="3500" b="1" i="0">
                 <a:latin typeface="Inter"/>
               </a:rPr>
               <a:t>Q4 2026 Customer Outcomes Review — flagship rollouts, expansion bookings, and headline retention metrics</a:t>
             </a:r>
-            <a:endParaRPr sz="3500" b="1" i="0">
+            <a:endParaRPr sz="3000" b="1" i="0">
               <a:latin typeface="Inter"/>
             </a:endParaRPr>
           </a:p>
@@ -3313,7 +3308,7 @@
         </p:nvSpPr>
         <p:spPr>
           <a:xfrm>
-            <a:off x="6126480" y="4937760"/>
+            <a:off x="6126480" y="4023360"/>
             <a:ext cx="5486400" cy="365760"/>
           </a:xfrm>
           <a:prstGeom prst="rect">

--- a/examples/showcase/_out/05_space_aware.pptx
+++ b/examples/showcase/_out/05_space_aware.pptx
@@ -3683,19 +3683,17 @@
         </p:spPr>
         <p:txBody>
           <a:bodyPr wrap="square">
-            <a:spAutoFit/>
+            <a:noAutofit/>
           </a:bodyPr>
           <a:lstStyle/>
           <a:p>
-            <a:pPr>
-              <a:defRPr sz="2800">
+            <a:r>
+              <a:rPr sz="2800">
                 <a:solidFill>
                   <a:srgbClr val="0F172A"/>
                 </a:solidFill>
-              </a:defRPr>
-            </a:pPr>
-            <a:r>
-              <a:t>This text is set at 28pt without word-wrapping a long enough string to overflow the height — fit_text would prevent this, but we're skipping it on purpose to show the lint output.</a:t>
+              </a:rPr>
+              <a:t>This text is set at 28pt with word-wrap on — the string is long enough to overflow the box's height. fit_text would prevent this, but we're skipping it on purpose to show the lint output.</a:t>
             </a:r>
           </a:p>
         </p:txBody>
